--- a/assets/pptx/catalog-605.pptx
+++ b/assets/pptx/catalog-605.pptx
@@ -3323,7 +3323,7 @@
                 <a:ea typeface="Ebrima"/>
                 <a:cs typeface="Ebrima"/>
               </a:rPr>
-              <a:t>ማርኮ አስቀርቶኛል ያ ፍቅርህ (2x)</a:t>
+              <a:t>ማርኮ አስቀርቶኛል ያ ፍቅርህ 2x</a:t>
             </a:r>
           </a:p>
         </p:txBody>
@@ -3390,7 +3390,7 @@
                 <a:ea typeface="Ebrima"/>
                 <a:cs typeface="Ebrima"/>
               </a:rPr>
-              <a:t>- ግዑዝ እንኳን ያመልክሃል የማያውቅህ የአንተን ፍቅር እንኳን ቀምሶ ያጣጣመህ እንደ እኔ አይነት ፍጡር (3x)</a:t>
+              <a:t>- ግዑዝ እንኳን ያመልክሃል የማያውቅህ የአንተን ፍቅር እንኳን ቀምሶ ያጣጣመህ እንደ እኔ አይነት ፍጡር 3x</a:t>
             </a:r>
           </a:p>
         </p:txBody>
@@ -3658,7 +3658,7 @@
                 <a:ea typeface="Ebrima"/>
                 <a:cs typeface="Ebrima"/>
               </a:rPr>
-              <a:t>ከዚህ በላይ ምነው በሆንኩለት (2x)</a:t>
+              <a:t>ከዚህ በላይ ምነው በሆንኩለት 2x</a:t>
             </a:r>
           </a:p>
         </p:txBody>
@@ -3725,7 +3725,7 @@
                 <a:ea typeface="Ebrima"/>
                 <a:cs typeface="Ebrima"/>
               </a:rPr>
-              <a:t>- ግዑዝ እንኳን ያመልክሃል የማያውቅህ የአንተን ፍቅር እንኳን ቀምሶ ያጣጣመህ እንደ እኔ አይነት ፍጡር (3x)</a:t>
+              <a:t>- ግዑዝ እንኳን ያመልክሃል የማያውቅህ የአንተን ፍቅር እንኳን ቀምሶ ያጣጣመህ እንደ እኔ አይነት ፍጡር 3x</a:t>
             </a:r>
           </a:p>
         </p:txBody>
@@ -3792,7 +3792,7 @@
                 <a:ea typeface="Ebrima"/>
                 <a:cs typeface="Ebrima"/>
               </a:rPr>
-              <a:t>- ግዑዝ እንኳን ያመልክሃል የማያውቅህ የአንተን ፍቅር እንኳን ቀምሶ ያጣጣመህ እንደ እኔ አይነት ፍጡር (3x)</a:t>
+              <a:t>- ግዑዝ እንኳን ያመልክሃል የማያውቅህ የአንተን ፍቅር እንኳን ቀምሶ ያጣጣመህ እንደ እኔ አይነት ፍጡር 3x</a:t>
             </a:r>
           </a:p>
         </p:txBody>
@@ -4060,7 +4060,7 @@
                 <a:ea typeface="Ebrima"/>
                 <a:cs typeface="Ebrima"/>
               </a:rPr>
-              <a:t>ከአንተ በቀር ሌላ አያምረው (2x)</a:t>
+              <a:t>ከአንተ በቀር ሌላ አያምረው 2x</a:t>
             </a:r>
           </a:p>
         </p:txBody>
@@ -4127,7 +4127,7 @@
                 <a:ea typeface="Ebrima"/>
                 <a:cs typeface="Ebrima"/>
               </a:rPr>
-              <a:t>- ግዑዝ እንኳን ያመልክሃል የማያውቅህ የአንተን ፍቅር እንኳን ቀምሶ ያጣጣመህ እንደ እኔ አይነት ፍጡር (3x)</a:t>
+              <a:t>- ግዑዝ እንኳን ያመልክሃል የማያውቅህ የአንተን ፍቅር እንኳን ቀምሶ ያጣጣመህ እንደ እኔ አይነት ፍጡር 3x</a:t>
             </a:r>
           </a:p>
         </p:txBody>
